--- a/figures/out/技术路线_可编辑.pptx
+++ b/figures/out/技术路线_可编辑.pptx
@@ -4221,7 +4221,7 @@
         </p:nvSpPr>
         <p:spPr>
           <a:xfrm>
-            <a:off x="2250000" y="2070000"/>
+            <a:off x="2141999" y="2070000"/>
             <a:ext cx="720000" cy="180000"/>
           </a:xfrm>
           <a:prstGeom prst="rect">
@@ -4258,7 +4258,7 @@
         </p:nvSpPr>
         <p:spPr>
           <a:xfrm>
-            <a:off x="4518000" y="2070000"/>
+            <a:off x="4410000" y="2070000"/>
             <a:ext cx="720000" cy="180000"/>
           </a:xfrm>
           <a:prstGeom prst="rect">
@@ -4487,14 +4487,14 @@
           <p:cNvPr id="32" name="Connector 31"/>
           <p:cNvCxnSpPr>
             <a:stCxn id="18" idx="1"/>
-            <a:endCxn id="15" idx="2"/>
+            <a:endCxn id="15" idx="1"/>
           </p:cNvCxnSpPr>
           <p:nvPr/>
         </p:nvCxnSpPr>
         <p:spPr>
-          <a:xfrm flipV="1">
-            <a:off x="1224000" y="2934000"/>
-            <a:ext cx="143999" cy="702000"/>
+          <a:xfrm flipH="1" flipV="1">
+            <a:off x="360000" y="2601000"/>
+            <a:ext cx="864000" cy="1035000"/>
           </a:xfrm>
           <a:prstGeom prst="bentConnector3">
             <a:avLst/>
@@ -4530,8 +4530,8 @@
         </p:nvSpPr>
         <p:spPr>
           <a:xfrm>
-            <a:off x="125999" y="3078000"/>
-            <a:ext cx="1116000" cy="198000"/>
+            <a:off x="125999" y="3690000"/>
+            <a:ext cx="1080000" cy="180000"/>
           </a:xfrm>
           <a:prstGeom prst="rect">
             <a:avLst/>
@@ -4544,7 +4544,7 @@
           </a:bodyPr>
           <a:lstStyle/>
           <a:p>
-            <a:pPr algn="ctr"/>
+            <a:pPr algn="l"/>
             <a:r>
               <a:rPr sz="800" b="0">
                 <a:solidFill>
@@ -5064,8 +5064,8 @@
         </p:nvSpPr>
         <p:spPr>
           <a:xfrm>
-            <a:off x="1512000" y="756000"/>
-            <a:ext cx="3384000" cy="630000"/>
+            <a:off x="2124000" y="756000"/>
+            <a:ext cx="3168000" cy="630000"/>
           </a:xfrm>
           <a:prstGeom prst="roundRect">
             <a:avLst/>
@@ -5135,8 +5135,8 @@
         </p:nvSpPr>
         <p:spPr>
           <a:xfrm>
-            <a:off x="1512000" y="1655999"/>
-            <a:ext cx="3384000" cy="630000"/>
+            <a:off x="2124000" y="1655999"/>
+            <a:ext cx="3168000" cy="630000"/>
           </a:xfrm>
           <a:prstGeom prst="roundRect">
             <a:avLst/>
@@ -5206,8 +5206,8 @@
         </p:nvSpPr>
         <p:spPr>
           <a:xfrm>
-            <a:off x="1512000" y="2556000"/>
-            <a:ext cx="3384000" cy="630000"/>
+            <a:off x="2124000" y="2556000"/>
+            <a:ext cx="3168000" cy="630000"/>
           </a:xfrm>
           <a:prstGeom prst="roundRect">
             <a:avLst/>
@@ -5277,8 +5277,8 @@
         </p:nvSpPr>
         <p:spPr>
           <a:xfrm>
-            <a:off x="1512000" y="3456000"/>
-            <a:ext cx="3384000" cy="630000"/>
+            <a:off x="2124000" y="3456000"/>
+            <a:ext cx="3168000" cy="630000"/>
           </a:xfrm>
           <a:prstGeom prst="roundRect">
             <a:avLst/>
@@ -5348,8 +5348,8 @@
         </p:nvSpPr>
         <p:spPr>
           <a:xfrm>
-            <a:off x="1512000" y="4356000"/>
-            <a:ext cx="3384000" cy="630000"/>
+            <a:off x="2124000" y="4356000"/>
+            <a:ext cx="3168000" cy="630000"/>
           </a:xfrm>
           <a:prstGeom prst="roundRect">
             <a:avLst/>
@@ -5422,7 +5422,7 @@
         </p:nvCxnSpPr>
         <p:spPr>
           <a:xfrm flipH="1">
-            <a:off x="3204000" y="1386000"/>
+            <a:off x="3708000" y="1386000"/>
             <a:ext cx="0" cy="269999"/>
           </a:xfrm>
           <a:prstGeom prst="line">
@@ -5461,7 +5461,7 @@
         </p:nvCxnSpPr>
         <p:spPr>
           <a:xfrm flipH="1">
-            <a:off x="3204000" y="2285999"/>
+            <a:off x="3708000" y="2285999"/>
             <a:ext cx="0" cy="270001"/>
           </a:xfrm>
           <a:prstGeom prst="line">
@@ -5500,7 +5500,7 @@
         </p:nvCxnSpPr>
         <p:spPr>
           <a:xfrm flipH="1">
-            <a:off x="3204000" y="3186000"/>
+            <a:off x="3708000" y="3186000"/>
             <a:ext cx="0" cy="270000"/>
           </a:xfrm>
           <a:prstGeom prst="line">
@@ -5539,7 +5539,7 @@
         </p:nvCxnSpPr>
         <p:spPr>
           <a:xfrm flipH="1">
-            <a:off x="3204000" y="4086000"/>
+            <a:off x="3708000" y="4086000"/>
             <a:ext cx="0" cy="270000"/>
           </a:xfrm>
           <a:prstGeom prst="line">
@@ -5578,7 +5578,7 @@
         </p:nvCxnSpPr>
         <p:spPr>
           <a:xfrm flipV="1" flipH="1">
-            <a:off x="4896000" y="1970999"/>
+            <a:off x="5292000" y="1970999"/>
             <a:ext cx="0" cy="1800001"/>
           </a:xfrm>
           <a:prstGeom prst="bentConnector3">
@@ -5615,8 +5615,8 @@
         </p:nvSpPr>
         <p:spPr>
           <a:xfrm>
-            <a:off x="5040000" y="2124000"/>
-            <a:ext cx="1908000" cy="396000"/>
+            <a:off x="5400000" y="2124000"/>
+            <a:ext cx="1655999" cy="396000"/>
           </a:xfrm>
           <a:prstGeom prst="rect">
             <a:avLst/>
@@ -5667,7 +5667,7 @@
         <p:spPr>
           <a:xfrm>
             <a:off x="108000" y="1080000"/>
-            <a:ext cx="1296000" cy="1655999"/>
+            <a:ext cx="1980000" cy="1655999"/>
           </a:xfrm>
           <a:prstGeom prst="rect">
             <a:avLst/>
